--- a/topic03-dataTypes-variables-and-expressions/side-unit/book-3/c-non-integers.pptx
+++ b/topic03-dataTypes-variables-and-expressions/side-unit/book-3/c-non-integers.pptx
@@ -8,7 +8,7 @@
     <p:notesMasterId r:id="rId3"/>
   </p:notesMasterIdLst>
   <p:sldIdLst>
-    <p:sldId id="277" r:id="rId2"/>
+    <p:sldId id="278" r:id="rId2"/>
   </p:sldIdLst>
   <p:sldSz cx="12192000" cy="6858000"/>
   <p:notesSz cx="6858000" cy="9144000"/>
@@ -537,38 +537,14 @@
           <a:bodyPr/>
           <a:lstStyle/>
           <a:p>
-            <a:r>
-              <a:rPr lang="en-US" dirty="0"/>
-              <a:t>I usually show them how the minimum and max values for byte are calculated e.g. </a:t>
-            </a:r>
-          </a:p>
-          <a:p>
-            <a:r>
-              <a:rPr lang="en-US" dirty="0"/>
-              <a:t>8-bit is 2 to the power of 8 = 256</a:t>
-            </a:r>
-          </a:p>
-          <a:p>
-            <a:endParaRPr lang="en-US" dirty="0"/>
-          </a:p>
-          <a:p>
-            <a:r>
-              <a:rPr lang="en-US" dirty="0"/>
-              <a:t>To spread this value over the negative/positive number range, divide by two = 128.  so -128 range up to +127, with 0 being on the “positive size”. </a:t>
-            </a:r>
-          </a:p>
-          <a:p>
-            <a:r>
-              <a:rPr lang="en-US" dirty="0"/>
-              <a:t>Then they can always work out the min/max values for the other whole numbers.  </a:t>
-            </a:r>
+            <a:endParaRPr lang="en-US"/>
           </a:p>
         </p:txBody>
       </p:sp>
     </p:spTree>
     <p:extLst>
       <p:ext uri="{BB962C8B-B14F-4D97-AF65-F5344CB8AC3E}">
-        <p14:creationId xmlns:p14="http://schemas.microsoft.com/office/powerpoint/2010/main" val="3203946058"/>
+        <p14:creationId xmlns:p14="http://schemas.microsoft.com/office/powerpoint/2010/main" val="684736897"/>
       </p:ext>
     </p:extLst>
   </p:cSld>
@@ -3833,7 +3809,7 @@
             <a:pPr algn="ctr"/>
             <a:r>
               <a:rPr lang="en-US" sz="3600" dirty="0"/>
-              <a:t>Java’s Primitive Data Types (whole numbers)</a:t>
+              <a:t>Java’s Primitive Data Types (decimal numbers)</a:t>
             </a:r>
           </a:p>
         </p:txBody>
@@ -3871,21 +3847,21 @@
       </p:sp>
       <p:graphicFrame>
         <p:nvGraphicFramePr>
-          <p:cNvPr id="2" name="Table 1"/>
+          <p:cNvPr id="4" name="Table 3"/>
           <p:cNvGraphicFramePr>
             <a:graphicFrameLocks noGrp="1"/>
           </p:cNvGraphicFramePr>
           <p:nvPr>
             <p:extLst>
               <p:ext uri="{D42A27DB-BD31-4B8C-83A1-F6EECF244321}">
-                <p14:modId xmlns:p14="http://schemas.microsoft.com/office/powerpoint/2010/main" val="403930800"/>
+                <p14:modId xmlns:p14="http://schemas.microsoft.com/office/powerpoint/2010/main" val="1042282718"/>
               </p:ext>
             </p:extLst>
           </p:nvPr>
         </p:nvGraphicFramePr>
         <p:xfrm>
-          <a:off x="1039989" y="1923574"/>
-          <a:ext cx="10112022" cy="4155440"/>
+          <a:off x="1943100" y="1822980"/>
+          <a:ext cx="8305800" cy="4334802"/>
         </p:xfrm>
         <a:graphic>
           <a:graphicData uri="http://schemas.openxmlformats.org/drawingml/2006/table">
@@ -3894,35 +3870,35 @@
                 <a:tableStyleId>{5C22544A-7EE6-4342-B048-85BDC9FD1C3A}</a:tableStyleId>
               </a:tblPr>
               <a:tblGrid>
-                <a:gridCol w="975721">
+                <a:gridCol w="1066800">
                   <a:extLst>
                     <a:ext uri="{9D8B030D-6E8A-4147-A177-3AD203B41FA5}">
                       <a16:colId xmlns:a16="http://schemas.microsoft.com/office/drawing/2014/main" val="20000"/>
                     </a:ext>
                   </a:extLst>
                 </a:gridCol>
-                <a:gridCol w="1153125">
+                <a:gridCol w="990600">
                   <a:extLst>
                     <a:ext uri="{9D8B030D-6E8A-4147-A177-3AD203B41FA5}">
                       <a16:colId xmlns:a16="http://schemas.microsoft.com/office/drawing/2014/main" val="20001"/>
                     </a:ext>
                   </a:extLst>
                 </a:gridCol>
-                <a:gridCol w="2394953">
+                <a:gridCol w="1901439">
                   <a:extLst>
                     <a:ext uri="{9D8B030D-6E8A-4147-A177-3AD203B41FA5}">
                       <a16:colId xmlns:a16="http://schemas.microsoft.com/office/drawing/2014/main" val="20002"/>
                     </a:ext>
                   </a:extLst>
                 </a:gridCol>
-                <a:gridCol w="2394953">
+                <a:gridCol w="2018232">
                   <a:extLst>
                     <a:ext uri="{9D8B030D-6E8A-4147-A177-3AD203B41FA5}">
                       <a16:colId xmlns:a16="http://schemas.microsoft.com/office/drawing/2014/main" val="20003"/>
                     </a:ext>
                   </a:extLst>
                 </a:gridCol>
-                <a:gridCol w="3193270">
+                <a:gridCol w="2328729">
                   <a:extLst>
                     <a:ext uri="{9D8B030D-6E8A-4147-A177-3AD203B41FA5}">
                       <a16:colId xmlns:a16="http://schemas.microsoft.com/office/drawing/2014/main" val="20004"/>
@@ -3930,13 +3906,12 @@
                   </a:extLst>
                 </a:gridCol>
               </a:tblGrid>
-              <a:tr h="524757">
+              <a:tr h="644508">
                 <a:tc>
                   <a:txBody>
                     <a:bodyPr/>
                     <a:lstStyle/>
                     <a:p>
-                      <a:pPr algn="ctr"/>
                       <a:r>
                         <a:rPr lang="en-IE" dirty="0"/>
                         <a:t>Type</a:t>
@@ -3953,112 +3928,6 @@
                       <a:headEnd type="none" w="med" len="med"/>
                       <a:tailEnd type="none" w="med" len="med"/>
                     </a:lnL>
-                    <a:lnT w="12700" cap="flat" cmpd="sng" algn="ctr">
-                      <a:solidFill>
-                        <a:schemeClr val="tx1"/>
-                      </a:solidFill>
-                      <a:prstDash val="solid"/>
-                      <a:round/>
-                      <a:headEnd type="none" w="med" len="med"/>
-                      <a:tailEnd type="none" w="med" len="med"/>
-                    </a:lnT>
-                  </a:tcPr>
-                </a:tc>
-                <a:tc>
-                  <a:txBody>
-                    <a:bodyPr/>
-                    <a:lstStyle/>
-                    <a:p>
-                      <a:pPr algn="ctr"/>
-                      <a:r>
-                        <a:rPr lang="en-IE" dirty="0"/>
-                        <a:t>Byte-size</a:t>
-                      </a:r>
-                    </a:p>
-                  </a:txBody>
-                  <a:tcPr>
-                    <a:lnT w="12700" cap="flat" cmpd="sng" algn="ctr">
-                      <a:solidFill>
-                        <a:schemeClr val="tx1"/>
-                      </a:solidFill>
-                      <a:prstDash val="solid"/>
-                      <a:round/>
-                      <a:headEnd type="none" w="med" len="med"/>
-                      <a:tailEnd type="none" w="med" len="med"/>
-                    </a:lnT>
-                  </a:tcPr>
-                </a:tc>
-                <a:tc>
-                  <a:txBody>
-                    <a:bodyPr/>
-                    <a:lstStyle/>
-                    <a:p>
-                      <a:pPr algn="ctr"/>
-                      <a:r>
-                        <a:rPr lang="en-IE" dirty="0"/>
-                        <a:t>Minimum value</a:t>
-                      </a:r>
-                      <a:r>
-                        <a:rPr lang="en-IE" baseline="0" dirty="0"/>
-                        <a:t> (inclusive)</a:t>
-                      </a:r>
-                      <a:endParaRPr lang="en-IE" dirty="0"/>
-                    </a:p>
-                  </a:txBody>
-                  <a:tcPr>
-                    <a:lnT w="12700" cap="flat" cmpd="sng" algn="ctr">
-                      <a:solidFill>
-                        <a:schemeClr val="tx1"/>
-                      </a:solidFill>
-                      <a:prstDash val="solid"/>
-                      <a:round/>
-                      <a:headEnd type="none" w="med" len="med"/>
-                      <a:tailEnd type="none" w="med" len="med"/>
-                    </a:lnT>
-                  </a:tcPr>
-                </a:tc>
-                <a:tc>
-                  <a:txBody>
-                    <a:bodyPr/>
-                    <a:lstStyle/>
-                    <a:p>
-                      <a:pPr algn="ctr"/>
-                      <a:r>
-                        <a:rPr lang="en-IE" dirty="0"/>
-                        <a:t>Maximum value </a:t>
-                      </a:r>
-                      <a:r>
-                        <a:rPr lang="en-IE" baseline="0" dirty="0"/>
-                        <a:t>(inclusive)</a:t>
-                      </a:r>
-                      <a:endParaRPr lang="en-IE" dirty="0"/>
-                    </a:p>
-                  </a:txBody>
-                  <a:tcPr>
-                    <a:lnT w="12700" cap="flat" cmpd="sng" algn="ctr">
-                      <a:solidFill>
-                        <a:schemeClr val="tx1"/>
-                      </a:solidFill>
-                      <a:prstDash val="solid"/>
-                      <a:round/>
-                      <a:headEnd type="none" w="med" len="med"/>
-                      <a:tailEnd type="none" w="med" len="med"/>
-                    </a:lnT>
-                  </a:tcPr>
-                </a:tc>
-                <a:tc>
-                  <a:txBody>
-                    <a:bodyPr/>
-                    <a:lstStyle/>
-                    <a:p>
-                      <a:pPr algn="ctr"/>
-                      <a:r>
-                        <a:rPr lang="en-IE" dirty="0"/>
-                        <a:t>Typical Use</a:t>
-                      </a:r>
-                    </a:p>
-                  </a:txBody>
-                  <a:tcPr>
                     <a:lnR w="12700" cap="flat" cmpd="sng" algn="ctr">
                       <a:solidFill>
                         <a:schemeClr val="tx1"/>
@@ -4077,425 +3946,6 @@
                       <a:headEnd type="none" w="med" len="med"/>
                       <a:tailEnd type="none" w="med" len="med"/>
                     </a:lnT>
-                  </a:tcPr>
-                </a:tc>
-                <a:extLst>
-                  <a:ext uri="{0D108BD9-81ED-4DB2-BD59-A6C34878D82A}">
-                    <a16:rowId xmlns:a16="http://schemas.microsoft.com/office/drawing/2014/main" val="10000"/>
-                  </a:ext>
-                </a:extLst>
-              </a:tr>
-              <a:tr h="782320">
-                <a:tc>
-                  <a:txBody>
-                    <a:bodyPr/>
-                    <a:lstStyle/>
-                    <a:p>
-                      <a:pPr algn="l"/>
-                      <a:r>
-                        <a:rPr lang="en-IE" sz="2400" dirty="0">
-                          <a:solidFill>
-                            <a:srgbClr val="FF0000"/>
-                          </a:solidFill>
-                        </a:rPr>
-                        <a:t>byte</a:t>
-                      </a:r>
-                    </a:p>
-                  </a:txBody>
-                  <a:tcPr>
-                    <a:lnL w="12700" cap="flat" cmpd="sng" algn="ctr">
-                      <a:solidFill>
-                        <a:schemeClr val="tx1"/>
-                      </a:solidFill>
-                      <a:prstDash val="solid"/>
-                      <a:round/>
-                      <a:headEnd type="none" w="med" len="med"/>
-                      <a:tailEnd type="none" w="med" len="med"/>
-                    </a:lnL>
-                  </a:tcPr>
-                </a:tc>
-                <a:tc>
-                  <a:txBody>
-                    <a:bodyPr/>
-                    <a:lstStyle/>
-                    <a:p>
-                      <a:r>
-                        <a:rPr lang="en-IE" sz="2400" dirty="0"/>
-                        <a:t>8-bit</a:t>
-                      </a:r>
-                    </a:p>
-                  </a:txBody>
-                  <a:tcPr/>
-                </a:tc>
-                <a:tc>
-                  <a:txBody>
-                    <a:bodyPr/>
-                    <a:lstStyle/>
-                    <a:p>
-                      <a:pPr marL="0" algn="l" defTabSz="914400" rtl="0" eaLnBrk="1" latinLnBrk="0" hangingPunct="1"/>
-                      <a:r>
-                        <a:rPr lang="en-IE" sz="2400" kern="1200" dirty="0">
-                          <a:solidFill>
-                            <a:schemeClr val="dk1"/>
-                          </a:solidFill>
-                          <a:latin typeface="+mn-lt"/>
-                          <a:ea typeface="+mn-ea"/>
-                          <a:cs typeface="+mn-cs"/>
-                        </a:rPr>
-                        <a:t>-128</a:t>
-                      </a:r>
-                    </a:p>
-                  </a:txBody>
-                  <a:tcPr/>
-                </a:tc>
-                <a:tc>
-                  <a:txBody>
-                    <a:bodyPr/>
-                    <a:lstStyle/>
-                    <a:p>
-                      <a:pPr marL="0" algn="l" defTabSz="914400" rtl="0" eaLnBrk="1" latinLnBrk="0" hangingPunct="1"/>
-                      <a:r>
-                        <a:rPr lang="en-IE" sz="2400" kern="1200" dirty="0">
-                          <a:solidFill>
-                            <a:schemeClr val="dk1"/>
-                          </a:solidFill>
-                          <a:latin typeface="+mn-lt"/>
-                          <a:ea typeface="+mn-ea"/>
-                          <a:cs typeface="+mn-cs"/>
-                        </a:rPr>
-                        <a:t>127</a:t>
-                      </a:r>
-                    </a:p>
-                  </a:txBody>
-                  <a:tcPr/>
-                </a:tc>
-                <a:tc rowSpan="2">
-                  <a:txBody>
-                    <a:bodyPr/>
-                    <a:lstStyle/>
-                    <a:p>
-                      <a:pPr marL="0" algn="l" defTabSz="914400" rtl="0" eaLnBrk="1" latinLnBrk="0" hangingPunct="1"/>
-                      <a:r>
-                        <a:rPr lang="en-IE" sz="2400" kern="1200" dirty="0">
-                          <a:solidFill>
-                            <a:schemeClr val="dk1"/>
-                          </a:solidFill>
-                          <a:latin typeface="+mn-lt"/>
-                          <a:ea typeface="+mn-ea"/>
-                          <a:cs typeface="+mn-cs"/>
-                        </a:rPr>
-                        <a:t>Useful in applications where memory savings apply.</a:t>
-                      </a:r>
-                    </a:p>
-                  </a:txBody>
-                  <a:tcPr>
-                    <a:lnR w="12700" cap="flat" cmpd="sng" algn="ctr">
-                      <a:solidFill>
-                        <a:schemeClr val="tx1"/>
-                      </a:solidFill>
-                      <a:prstDash val="solid"/>
-                      <a:round/>
-                      <a:headEnd type="none" w="med" len="med"/>
-                      <a:tailEnd type="none" w="med" len="med"/>
-                    </a:lnR>
-                  </a:tcPr>
-                </a:tc>
-                <a:extLst>
-                  <a:ext uri="{0D108BD9-81ED-4DB2-BD59-A6C34878D82A}">
-                    <a16:rowId xmlns:a16="http://schemas.microsoft.com/office/drawing/2014/main" val="10001"/>
-                  </a:ext>
-                </a:extLst>
-              </a:tr>
-              <a:tr h="589280">
-                <a:tc>
-                  <a:txBody>
-                    <a:bodyPr/>
-                    <a:lstStyle/>
-                    <a:p>
-                      <a:pPr algn="l"/>
-                      <a:r>
-                        <a:rPr lang="en-IE" sz="2400" dirty="0">
-                          <a:solidFill>
-                            <a:srgbClr val="FF0000"/>
-                          </a:solidFill>
-                        </a:rPr>
-                        <a:t>short</a:t>
-                      </a:r>
-                    </a:p>
-                  </a:txBody>
-                  <a:tcPr>
-                    <a:lnL w="12700" cap="flat" cmpd="sng" algn="ctr">
-                      <a:solidFill>
-                        <a:schemeClr val="tx1"/>
-                      </a:solidFill>
-                      <a:prstDash val="solid"/>
-                      <a:round/>
-                      <a:headEnd type="none" w="med" len="med"/>
-                      <a:tailEnd type="none" w="med" len="med"/>
-                    </a:lnL>
-                  </a:tcPr>
-                </a:tc>
-                <a:tc>
-                  <a:txBody>
-                    <a:bodyPr/>
-                    <a:lstStyle/>
-                    <a:p>
-                      <a:r>
-                        <a:rPr lang="en-IE" sz="2400" dirty="0"/>
-                        <a:t>16-bit</a:t>
-                      </a:r>
-                    </a:p>
-                  </a:txBody>
-                  <a:tcPr/>
-                </a:tc>
-                <a:tc>
-                  <a:txBody>
-                    <a:bodyPr/>
-                    <a:lstStyle/>
-                    <a:p>
-                      <a:pPr marL="0" algn="l" defTabSz="914400" rtl="0" eaLnBrk="1" latinLnBrk="0" hangingPunct="1"/>
-                      <a:r>
-                        <a:rPr lang="en-IE" sz="2400" kern="1200" dirty="0">
-                          <a:solidFill>
-                            <a:schemeClr val="dk1"/>
-                          </a:solidFill>
-                          <a:latin typeface="+mn-lt"/>
-                          <a:ea typeface="+mn-ea"/>
-                          <a:cs typeface="+mn-cs"/>
-                        </a:rPr>
-                        <a:t>-32,768</a:t>
-                      </a:r>
-                    </a:p>
-                  </a:txBody>
-                  <a:tcPr/>
-                </a:tc>
-                <a:tc>
-                  <a:txBody>
-                    <a:bodyPr/>
-                    <a:lstStyle/>
-                    <a:p>
-                      <a:pPr marL="0" algn="l" defTabSz="914400" rtl="0" eaLnBrk="1" latinLnBrk="0" hangingPunct="1"/>
-                      <a:r>
-                        <a:rPr lang="en-IE" sz="2400" kern="1200" dirty="0">
-                          <a:solidFill>
-                            <a:schemeClr val="dk1"/>
-                          </a:solidFill>
-                          <a:latin typeface="+mn-lt"/>
-                          <a:ea typeface="+mn-ea"/>
-                          <a:cs typeface="+mn-cs"/>
-                        </a:rPr>
-                        <a:t>32,767</a:t>
-                      </a:r>
-                    </a:p>
-                  </a:txBody>
-                  <a:tcPr/>
-                </a:tc>
-                <a:tc vMerge="1">
-                  <a:txBody>
-                    <a:bodyPr/>
-                    <a:lstStyle/>
-                    <a:p>
-                      <a:pPr marL="0" algn="l" defTabSz="914400" rtl="0" eaLnBrk="1" latinLnBrk="0" hangingPunct="1"/>
-                      <a:endParaRPr lang="en-IE" sz="2400" kern="1200" dirty="0">
-                        <a:solidFill>
-                          <a:schemeClr val="dk1"/>
-                        </a:solidFill>
-                        <a:latin typeface="+mn-lt"/>
-                        <a:ea typeface="+mn-ea"/>
-                        <a:cs typeface="+mn-cs"/>
-                      </a:endParaRPr>
-                    </a:p>
-                  </a:txBody>
-                  <a:tcPr/>
-                </a:tc>
-                <a:extLst>
-                  <a:ext uri="{0D108BD9-81ED-4DB2-BD59-A6C34878D82A}">
-                    <a16:rowId xmlns:a16="http://schemas.microsoft.com/office/drawing/2014/main" val="10002"/>
-                  </a:ext>
-                </a:extLst>
-              </a:tr>
-              <a:tr h="589280">
-                <a:tc>
-                  <a:txBody>
-                    <a:bodyPr/>
-                    <a:lstStyle/>
-                    <a:p>
-                      <a:pPr algn="l"/>
-                      <a:r>
-                        <a:rPr lang="en-IE" sz="2400" dirty="0" err="1">
-                          <a:solidFill>
-                            <a:srgbClr val="FF0000"/>
-                          </a:solidFill>
-                        </a:rPr>
-                        <a:t>int</a:t>
-                      </a:r>
-                      <a:endParaRPr lang="en-IE" sz="2400" dirty="0">
-                        <a:solidFill>
-                          <a:srgbClr val="FF0000"/>
-                        </a:solidFill>
-                      </a:endParaRPr>
-                    </a:p>
-                  </a:txBody>
-                  <a:tcPr>
-                    <a:lnL w="12700" cap="flat" cmpd="sng" algn="ctr">
-                      <a:solidFill>
-                        <a:schemeClr val="tx1"/>
-                      </a:solidFill>
-                      <a:prstDash val="solid"/>
-                      <a:round/>
-                      <a:headEnd type="none" w="med" len="med"/>
-                      <a:tailEnd type="none" w="med" len="med"/>
-                    </a:lnL>
-                  </a:tcPr>
-                </a:tc>
-                <a:tc>
-                  <a:txBody>
-                    <a:bodyPr/>
-                    <a:lstStyle/>
-                    <a:p>
-                      <a:r>
-                        <a:rPr lang="en-IE" sz="2400" dirty="0"/>
-                        <a:t>32-bit</a:t>
-                      </a:r>
-                    </a:p>
-                  </a:txBody>
-                  <a:tcPr/>
-                </a:tc>
-                <a:tc>
-                  <a:txBody>
-                    <a:bodyPr/>
-                    <a:lstStyle/>
-                    <a:p>
-                      <a:pPr marL="0" algn="l" defTabSz="914400" rtl="0" eaLnBrk="1" latinLnBrk="0" hangingPunct="1"/>
-                      <a:r>
-                        <a:rPr lang="en-IE" sz="2400" b="0" i="0" kern="1200" dirty="0">
-                          <a:solidFill>
-                            <a:schemeClr val="dk1"/>
-                          </a:solidFill>
-                          <a:effectLst/>
-                          <a:latin typeface="+mn-lt"/>
-                          <a:ea typeface="+mn-ea"/>
-                          <a:cs typeface="+mn-cs"/>
-                        </a:rPr>
-                        <a:t>-2,147,483,648</a:t>
-                      </a:r>
-                      <a:endParaRPr lang="en-IE" sz="3200" kern="1200" dirty="0">
-                        <a:solidFill>
-                          <a:schemeClr val="dk1"/>
-                        </a:solidFill>
-                        <a:latin typeface="+mn-lt"/>
-                        <a:ea typeface="+mn-ea"/>
-                        <a:cs typeface="+mn-cs"/>
-                      </a:endParaRPr>
-                    </a:p>
-                  </a:txBody>
-                  <a:tcPr/>
-                </a:tc>
-                <a:tc>
-                  <a:txBody>
-                    <a:bodyPr/>
-                    <a:lstStyle/>
-                    <a:p>
-                      <a:pPr marL="0" algn="l" defTabSz="914400" rtl="0" eaLnBrk="1" latinLnBrk="0" hangingPunct="1"/>
-                      <a:r>
-                        <a:rPr lang="en-IE" sz="2400" b="0" i="0" kern="1200" dirty="0">
-                          <a:solidFill>
-                            <a:schemeClr val="dk1"/>
-                          </a:solidFill>
-                          <a:effectLst/>
-                          <a:latin typeface="+mn-lt"/>
-                          <a:ea typeface="+mn-ea"/>
-                          <a:cs typeface="+mn-cs"/>
-                        </a:rPr>
-                        <a:t>2,147,483,647</a:t>
-                      </a:r>
-                      <a:endParaRPr lang="en-IE" sz="3200" kern="1200" dirty="0">
-                        <a:solidFill>
-                          <a:schemeClr val="dk1"/>
-                        </a:solidFill>
-                        <a:latin typeface="+mn-lt"/>
-                        <a:ea typeface="+mn-ea"/>
-                        <a:cs typeface="+mn-cs"/>
-                      </a:endParaRPr>
-                    </a:p>
-                  </a:txBody>
-                  <a:tcPr/>
-                </a:tc>
-                <a:tc>
-                  <a:txBody>
-                    <a:bodyPr/>
-                    <a:lstStyle/>
-                    <a:p>
-                      <a:pPr marL="0" algn="l" defTabSz="914400" rtl="0" eaLnBrk="1" latinLnBrk="0" hangingPunct="1"/>
-                      <a:r>
-                        <a:rPr lang="en-IE" sz="2400" b="1" kern="1200" dirty="0">
-                          <a:solidFill>
-                            <a:schemeClr val="dk1"/>
-                          </a:solidFill>
-                          <a:latin typeface="+mn-lt"/>
-                          <a:ea typeface="+mn-ea"/>
-                          <a:cs typeface="+mn-cs"/>
-                        </a:rPr>
-                        <a:t>Default</a:t>
-                      </a:r>
-                      <a:r>
-                        <a:rPr lang="en-IE" sz="2400" kern="1200" dirty="0">
-                          <a:solidFill>
-                            <a:schemeClr val="dk1"/>
-                          </a:solidFill>
-                          <a:latin typeface="+mn-lt"/>
-                          <a:ea typeface="+mn-ea"/>
-                          <a:cs typeface="+mn-cs"/>
-                        </a:rPr>
-                        <a:t> choice.</a:t>
-                      </a:r>
-                    </a:p>
-                  </a:txBody>
-                  <a:tcPr>
-                    <a:lnR w="12700" cap="flat" cmpd="sng" algn="ctr">
-                      <a:solidFill>
-                        <a:schemeClr val="tx1"/>
-                      </a:solidFill>
-                      <a:prstDash val="solid"/>
-                      <a:round/>
-                      <a:headEnd type="none" w="med" len="med"/>
-                      <a:tailEnd type="none" w="med" len="med"/>
-                    </a:lnR>
-                  </a:tcPr>
-                </a:tc>
-                <a:extLst>
-                  <a:ext uri="{0D108BD9-81ED-4DB2-BD59-A6C34878D82A}">
-                    <a16:rowId xmlns:a16="http://schemas.microsoft.com/office/drawing/2014/main" val="10003"/>
-                  </a:ext>
-                </a:extLst>
-              </a:tr>
-              <a:tr h="589280">
-                <a:tc>
-                  <a:txBody>
-                    <a:bodyPr/>
-                    <a:lstStyle/>
-                    <a:p>
-                      <a:pPr algn="l"/>
-                      <a:r>
-                        <a:rPr lang="en-IE" sz="2400" dirty="0">
-                          <a:solidFill>
-                            <a:srgbClr val="FF0000"/>
-                          </a:solidFill>
-                        </a:rPr>
-                        <a:t>long</a:t>
-                      </a:r>
-                    </a:p>
-                  </a:txBody>
-                  <a:tcPr>
-                    <a:lnL w="12700" cap="flat" cmpd="sng" algn="ctr">
-                      <a:solidFill>
-                        <a:schemeClr val="tx1"/>
-                      </a:solidFill>
-                      <a:prstDash val="solid"/>
-                      <a:round/>
-                      <a:headEnd type="none" w="med" len="med"/>
-                      <a:tailEnd type="none" w="med" len="med"/>
-                    </a:lnL>
                     <a:lnB w="12700" cap="flat" cmpd="sng" algn="ctr">
                       <a:solidFill>
                         <a:schemeClr val="tx1"/>
@@ -4513,12 +3963,39 @@
                     <a:lstStyle/>
                     <a:p>
                       <a:r>
-                        <a:rPr lang="en-IE" sz="2400" dirty="0"/>
-                        <a:t>64-bit</a:t>
+                        <a:rPr lang="en-IE" dirty="0"/>
+                        <a:t>Byte-size</a:t>
                       </a:r>
                     </a:p>
                   </a:txBody>
                   <a:tcPr>
+                    <a:lnL w="12700" cap="flat" cmpd="sng" algn="ctr">
+                      <a:solidFill>
+                        <a:schemeClr val="tx1"/>
+                      </a:solidFill>
+                      <a:prstDash val="solid"/>
+                      <a:round/>
+                      <a:headEnd type="none" w="med" len="med"/>
+                      <a:tailEnd type="none" w="med" len="med"/>
+                    </a:lnL>
+                    <a:lnR w="12700" cap="flat" cmpd="sng" algn="ctr">
+                      <a:solidFill>
+                        <a:schemeClr val="tx1"/>
+                      </a:solidFill>
+                      <a:prstDash val="solid"/>
+                      <a:round/>
+                      <a:headEnd type="none" w="med" len="med"/>
+                      <a:tailEnd type="none" w="med" len="med"/>
+                    </a:lnR>
+                    <a:lnT w="12700" cap="flat" cmpd="sng" algn="ctr">
+                      <a:solidFill>
+                        <a:schemeClr val="tx1"/>
+                      </a:solidFill>
+                      <a:prstDash val="solid"/>
+                      <a:round/>
+                      <a:headEnd type="none" w="med" len="med"/>
+                      <a:tailEnd type="none" w="med" len="med"/>
+                    </a:lnT>
                     <a:lnB w="12700" cap="flat" cmpd="sng" algn="ctr">
                       <a:solidFill>
                         <a:schemeClr val="tx1"/>
@@ -4535,30 +4012,45 @@
                     <a:bodyPr/>
                     <a:lstStyle/>
                     <a:p>
-                      <a:pPr marL="0" algn="l" defTabSz="914400" rtl="0" eaLnBrk="1" latinLnBrk="0" hangingPunct="1"/>
                       <a:r>
-                        <a:rPr lang="en-IE" sz="2400" b="0" i="0" kern="1200" dirty="0">
-                          <a:solidFill>
-                            <a:schemeClr val="dk1"/>
-                          </a:solidFill>
-                          <a:effectLst/>
-                          <a:latin typeface="+mn-lt"/>
-                          <a:ea typeface="+mn-ea"/>
-                          <a:cs typeface="+mn-cs"/>
-                        </a:rPr>
-                        <a:t>-9,223,372,036,854,775,808</a:t>
+                        <a:rPr lang="en-IE" dirty="0"/>
+                        <a:t>Minimum value</a:t>
                       </a:r>
-                      <a:endParaRPr lang="en-IE" sz="3200" kern="1200" dirty="0">
-                        <a:solidFill>
-                          <a:schemeClr val="dk1"/>
-                        </a:solidFill>
-                        <a:latin typeface="+mn-lt"/>
-                        <a:ea typeface="+mn-ea"/>
-                        <a:cs typeface="+mn-cs"/>
-                      </a:endParaRPr>
+                      <a:r>
+                        <a:rPr lang="en-IE" baseline="0" dirty="0"/>
+                        <a:t> (inclusive)</a:t>
+                      </a:r>
+                      <a:endParaRPr lang="en-IE" dirty="0"/>
                     </a:p>
                   </a:txBody>
                   <a:tcPr>
+                    <a:lnL w="12700" cap="flat" cmpd="sng" algn="ctr">
+                      <a:solidFill>
+                        <a:schemeClr val="tx1"/>
+                      </a:solidFill>
+                      <a:prstDash val="solid"/>
+                      <a:round/>
+                      <a:headEnd type="none" w="med" len="med"/>
+                      <a:tailEnd type="none" w="med" len="med"/>
+                    </a:lnL>
+                    <a:lnR w="12700" cap="flat" cmpd="sng" algn="ctr">
+                      <a:solidFill>
+                        <a:schemeClr val="tx1"/>
+                      </a:solidFill>
+                      <a:prstDash val="solid"/>
+                      <a:round/>
+                      <a:headEnd type="none" w="med" len="med"/>
+                      <a:tailEnd type="none" w="med" len="med"/>
+                    </a:lnR>
+                    <a:lnT w="12700" cap="flat" cmpd="sng" algn="ctr">
+                      <a:solidFill>
+                        <a:schemeClr val="tx1"/>
+                      </a:solidFill>
+                      <a:prstDash val="solid"/>
+                      <a:round/>
+                      <a:headEnd type="none" w="med" len="med"/>
+                      <a:tailEnd type="none" w="med" len="med"/>
+                    </a:lnT>
                     <a:lnB w="12700" cap="flat" cmpd="sng" algn="ctr">
                       <a:solidFill>
                         <a:schemeClr val="tx1"/>
@@ -4575,30 +4067,45 @@
                     <a:bodyPr/>
                     <a:lstStyle/>
                     <a:p>
-                      <a:pPr marL="0" algn="l" defTabSz="914400" rtl="0" eaLnBrk="1" latinLnBrk="0" hangingPunct="1"/>
                       <a:r>
-                        <a:rPr lang="en-IE" sz="2400" b="0" i="0" kern="1200" dirty="0">
-                          <a:solidFill>
-                            <a:schemeClr val="dk1"/>
-                          </a:solidFill>
-                          <a:effectLst/>
-                          <a:latin typeface="+mn-lt"/>
-                          <a:ea typeface="+mn-ea"/>
-                          <a:cs typeface="+mn-cs"/>
-                        </a:rPr>
-                        <a:t>9,223,372,036,854,775,807</a:t>
+                        <a:rPr lang="en-IE" dirty="0"/>
+                        <a:t>Maximum value </a:t>
                       </a:r>
-                      <a:endParaRPr lang="en-IE" sz="3200" kern="1200" dirty="0">
-                        <a:solidFill>
-                          <a:schemeClr val="dk1"/>
-                        </a:solidFill>
-                        <a:latin typeface="+mn-lt"/>
-                        <a:ea typeface="+mn-ea"/>
-                        <a:cs typeface="+mn-cs"/>
-                      </a:endParaRPr>
+                      <a:r>
+                        <a:rPr lang="en-IE" baseline="0" dirty="0"/>
+                        <a:t>(inclusive)</a:t>
+                      </a:r>
+                      <a:endParaRPr lang="en-IE" dirty="0"/>
                     </a:p>
                   </a:txBody>
                   <a:tcPr>
+                    <a:lnL w="12700" cap="flat" cmpd="sng" algn="ctr">
+                      <a:solidFill>
+                        <a:schemeClr val="tx1"/>
+                      </a:solidFill>
+                      <a:prstDash val="solid"/>
+                      <a:round/>
+                      <a:headEnd type="none" w="med" len="med"/>
+                      <a:tailEnd type="none" w="med" len="med"/>
+                    </a:lnL>
+                    <a:lnR w="12700" cap="flat" cmpd="sng" algn="ctr">
+                      <a:solidFill>
+                        <a:schemeClr val="tx1"/>
+                      </a:solidFill>
+                      <a:prstDash val="solid"/>
+                      <a:round/>
+                      <a:headEnd type="none" w="med" len="med"/>
+                      <a:tailEnd type="none" w="med" len="med"/>
+                    </a:lnR>
+                    <a:lnT w="12700" cap="flat" cmpd="sng" algn="ctr">
+                      <a:solidFill>
+                        <a:schemeClr val="tx1"/>
+                      </a:solidFill>
+                      <a:prstDash val="solid"/>
+                      <a:round/>
+                      <a:headEnd type="none" w="med" len="med"/>
+                      <a:tailEnd type="none" w="med" len="med"/>
+                    </a:lnT>
                     <a:lnB w="12700" cap="flat" cmpd="sng" algn="ctr">
                       <a:solidFill>
                         <a:schemeClr val="tx1"/>
@@ -4615,40 +4122,22 @@
                     <a:bodyPr/>
                     <a:lstStyle/>
                     <a:p>
-                      <a:pPr marL="0" algn="l" defTabSz="914400" rtl="0" eaLnBrk="1" latinLnBrk="0" hangingPunct="1"/>
                       <a:r>
-                        <a:rPr lang="en-IE" sz="2400" kern="1200" dirty="0">
-                          <a:solidFill>
-                            <a:schemeClr val="dk1"/>
-                          </a:solidFill>
-                          <a:latin typeface="+mn-lt"/>
-                          <a:ea typeface="+mn-ea"/>
-                          <a:cs typeface="+mn-cs"/>
-                        </a:rPr>
-                        <a:t>Used when you need a data type</a:t>
+                        <a:rPr lang="en-IE" dirty="0"/>
+                        <a:t>Typical Use</a:t>
                       </a:r>
-                      <a:r>
-                        <a:rPr lang="en-IE" sz="2400" kern="1200" baseline="0" dirty="0">
-                          <a:solidFill>
-                            <a:schemeClr val="dk1"/>
-                          </a:solidFill>
-                          <a:latin typeface="+mn-lt"/>
-                          <a:ea typeface="+mn-ea"/>
-                          <a:cs typeface="+mn-cs"/>
-                        </a:rPr>
-                        <a:t> with a range of values larger than that provided by int.</a:t>
-                      </a:r>
-                      <a:endParaRPr lang="en-IE" sz="2400" kern="1200" dirty="0">
-                        <a:solidFill>
-                          <a:schemeClr val="dk1"/>
-                        </a:solidFill>
-                        <a:latin typeface="+mn-lt"/>
-                        <a:ea typeface="+mn-ea"/>
-                        <a:cs typeface="+mn-cs"/>
-                      </a:endParaRPr>
                     </a:p>
                   </a:txBody>
                   <a:tcPr>
+                    <a:lnL w="12700" cap="flat" cmpd="sng" algn="ctr">
+                      <a:solidFill>
+                        <a:schemeClr val="tx1"/>
+                      </a:solidFill>
+                      <a:prstDash val="solid"/>
+                      <a:round/>
+                      <a:headEnd type="none" w="med" len="med"/>
+                      <a:tailEnd type="none" w="med" len="med"/>
+                    </a:lnL>
                     <a:lnR w="12700" cap="flat" cmpd="sng" algn="ctr">
                       <a:solidFill>
                         <a:schemeClr val="tx1"/>
@@ -4658,6 +4147,15 @@
                       <a:headEnd type="none" w="med" len="med"/>
                       <a:tailEnd type="none" w="med" len="med"/>
                     </a:lnR>
+                    <a:lnT w="12700" cap="flat" cmpd="sng" algn="ctr">
+                      <a:solidFill>
+                        <a:schemeClr val="tx1"/>
+                      </a:solidFill>
+                      <a:prstDash val="solid"/>
+                      <a:round/>
+                      <a:headEnd type="none" w="med" len="med"/>
+                      <a:tailEnd type="none" w="med" len="med"/>
+                    </a:lnT>
                     <a:lnB w="12700" cap="flat" cmpd="sng" algn="ctr">
                       <a:solidFill>
                         <a:schemeClr val="tx1"/>
@@ -4671,7 +4169,659 @@
                 </a:tc>
                 <a:extLst>
                   <a:ext uri="{0D108BD9-81ED-4DB2-BD59-A6C34878D82A}">
-                    <a16:rowId xmlns:a16="http://schemas.microsoft.com/office/drawing/2014/main" val="10004"/>
+                    <a16:rowId xmlns:a16="http://schemas.microsoft.com/office/drawing/2014/main" val="10000"/>
+                  </a:ext>
+                </a:extLst>
+              </a:tr>
+              <a:tr h="1160454">
+                <a:tc>
+                  <a:txBody>
+                    <a:bodyPr/>
+                    <a:lstStyle/>
+                    <a:p>
+                      <a:endParaRPr lang="en-IE" sz="2000" dirty="0">
+                        <a:solidFill>
+                          <a:srgbClr val="FF0000"/>
+                        </a:solidFill>
+                      </a:endParaRPr>
+                    </a:p>
+                    <a:p>
+                      <a:r>
+                        <a:rPr lang="en-IE" sz="2000" dirty="0">
+                          <a:solidFill>
+                            <a:srgbClr val="FF0000"/>
+                          </a:solidFill>
+                        </a:rPr>
+                        <a:t>float</a:t>
+                      </a:r>
+                    </a:p>
+                  </a:txBody>
+                  <a:tcPr>
+                    <a:lnL w="12700" cap="flat" cmpd="sng" algn="ctr">
+                      <a:solidFill>
+                        <a:schemeClr val="tx1"/>
+                      </a:solidFill>
+                      <a:prstDash val="solid"/>
+                      <a:round/>
+                      <a:headEnd type="none" w="med" len="med"/>
+                      <a:tailEnd type="none" w="med" len="med"/>
+                    </a:lnL>
+                    <a:lnR w="12700" cap="flat" cmpd="sng" algn="ctr">
+                      <a:solidFill>
+                        <a:schemeClr val="tx1"/>
+                      </a:solidFill>
+                      <a:prstDash val="solid"/>
+                      <a:round/>
+                      <a:headEnd type="none" w="med" len="med"/>
+                      <a:tailEnd type="none" w="med" len="med"/>
+                    </a:lnR>
+                    <a:lnT w="12700" cap="flat" cmpd="sng" algn="ctr">
+                      <a:solidFill>
+                        <a:schemeClr val="tx1"/>
+                      </a:solidFill>
+                      <a:prstDash val="solid"/>
+                      <a:round/>
+                      <a:headEnd type="none" w="med" len="med"/>
+                      <a:tailEnd type="none" w="med" len="med"/>
+                    </a:lnT>
+                    <a:lnB w="12700" cap="flat" cmpd="sng" algn="ctr">
+                      <a:solidFill>
+                        <a:schemeClr val="tx1"/>
+                      </a:solidFill>
+                      <a:prstDash val="solid"/>
+                      <a:round/>
+                      <a:headEnd type="none" w="med" len="med"/>
+                      <a:tailEnd type="none" w="med" len="med"/>
+                    </a:lnB>
+                  </a:tcPr>
+                </a:tc>
+                <a:tc>
+                  <a:txBody>
+                    <a:bodyPr/>
+                    <a:lstStyle/>
+                    <a:p>
+                      <a:endParaRPr lang="en-IE" sz="2000" dirty="0"/>
+                    </a:p>
+                    <a:p>
+                      <a:r>
+                        <a:rPr lang="en-IE" sz="2000" dirty="0"/>
+                        <a:t>32-bit</a:t>
+                      </a:r>
+                    </a:p>
+                  </a:txBody>
+                  <a:tcPr>
+                    <a:lnL w="12700" cap="flat" cmpd="sng" algn="ctr">
+                      <a:solidFill>
+                        <a:schemeClr val="tx1"/>
+                      </a:solidFill>
+                      <a:prstDash val="solid"/>
+                      <a:round/>
+                      <a:headEnd type="none" w="med" len="med"/>
+                      <a:tailEnd type="none" w="med" len="med"/>
+                    </a:lnL>
+                    <a:lnR w="12700" cap="flat" cmpd="sng" algn="ctr">
+                      <a:solidFill>
+                        <a:schemeClr val="tx1"/>
+                      </a:solidFill>
+                      <a:prstDash val="solid"/>
+                      <a:round/>
+                      <a:headEnd type="none" w="med" len="med"/>
+                      <a:tailEnd type="none" w="med" len="med"/>
+                    </a:lnR>
+                    <a:lnT w="12700" cap="flat" cmpd="sng" algn="ctr">
+                      <a:solidFill>
+                        <a:schemeClr val="tx1"/>
+                      </a:solidFill>
+                      <a:prstDash val="solid"/>
+                      <a:round/>
+                      <a:headEnd type="none" w="med" len="med"/>
+                      <a:tailEnd type="none" w="med" len="med"/>
+                    </a:lnT>
+                    <a:lnB w="12700" cap="flat" cmpd="sng" algn="ctr">
+                      <a:solidFill>
+                        <a:schemeClr val="tx1"/>
+                      </a:solidFill>
+                      <a:prstDash val="solid"/>
+                      <a:round/>
+                      <a:headEnd type="none" w="med" len="med"/>
+                      <a:tailEnd type="none" w="med" len="med"/>
+                    </a:lnB>
+                  </a:tcPr>
+                </a:tc>
+                <a:tc rowSpan="2" gridSpan="2">
+                  <a:txBody>
+                    <a:bodyPr/>
+                    <a:lstStyle/>
+                    <a:p>
+                      <a:pPr marL="0" algn="l" defTabSz="914400" rtl="0" eaLnBrk="1" latinLnBrk="0" hangingPunct="1"/>
+                      <a:endParaRPr lang="en-IE" sz="2000" i="1" kern="1200" dirty="0">
+                        <a:solidFill>
+                          <a:schemeClr val="bg1">
+                            <a:lumMod val="50000"/>
+                          </a:schemeClr>
+                        </a:solidFill>
+                        <a:latin typeface="+mn-lt"/>
+                        <a:ea typeface="+mn-ea"/>
+                        <a:cs typeface="+mn-cs"/>
+                      </a:endParaRPr>
+                    </a:p>
+                    <a:p>
+                      <a:pPr marL="0" algn="l" defTabSz="914400" rtl="0" eaLnBrk="1" latinLnBrk="0" hangingPunct="1"/>
+                      <a:endParaRPr lang="en-IE" sz="2000" i="1" kern="1200" dirty="0">
+                        <a:solidFill>
+                          <a:schemeClr val="bg1">
+                            <a:lumMod val="50000"/>
+                          </a:schemeClr>
+                        </a:solidFill>
+                        <a:latin typeface="+mn-lt"/>
+                        <a:ea typeface="+mn-ea"/>
+                        <a:cs typeface="+mn-cs"/>
+                      </a:endParaRPr>
+                    </a:p>
+                    <a:p>
+                      <a:pPr marL="0" algn="l" defTabSz="914400" rtl="0" eaLnBrk="1" latinLnBrk="0" hangingPunct="1"/>
+                      <a:r>
+                        <a:rPr lang="en-IE" sz="2000" i="1" kern="1200" dirty="0">
+                          <a:solidFill>
+                            <a:schemeClr val="bg1">
+                              <a:lumMod val="50000"/>
+                            </a:schemeClr>
+                          </a:solidFill>
+                          <a:latin typeface="+mn-lt"/>
+                          <a:ea typeface="+mn-ea"/>
+                          <a:cs typeface="+mn-cs"/>
+                        </a:rPr>
+                        <a:t>Beyond the scope of this lecture .  </a:t>
+                      </a:r>
+                    </a:p>
+                    <a:p>
+                      <a:pPr marL="0" algn="l" defTabSz="914400" rtl="0" eaLnBrk="1" latinLnBrk="0" hangingPunct="1"/>
+                      <a:endParaRPr lang="en-IE" sz="2000" i="1" kern="1200" dirty="0">
+                        <a:solidFill>
+                          <a:schemeClr val="bg1">
+                            <a:lumMod val="50000"/>
+                          </a:schemeClr>
+                        </a:solidFill>
+                        <a:latin typeface="+mn-lt"/>
+                        <a:ea typeface="+mn-ea"/>
+                        <a:cs typeface="+mn-cs"/>
+                      </a:endParaRPr>
+                    </a:p>
+                    <a:p>
+                      <a:pPr marL="0" algn="l" defTabSz="914400" rtl="0" eaLnBrk="1" latinLnBrk="0" hangingPunct="1"/>
+                      <a:r>
+                        <a:rPr lang="en-IE" sz="2000" i="1" kern="1200" dirty="0">
+                          <a:solidFill>
+                            <a:schemeClr val="bg1">
+                              <a:lumMod val="50000"/>
+                            </a:schemeClr>
+                          </a:solidFill>
+                          <a:latin typeface="+mn-lt"/>
+                          <a:ea typeface="+mn-ea"/>
+                          <a:cs typeface="+mn-cs"/>
+                        </a:rPr>
+                        <a:t>There is also a loss of precision in</a:t>
+                      </a:r>
+                      <a:r>
+                        <a:rPr lang="en-IE" sz="2000" i="1" kern="1200" baseline="0" dirty="0">
+                          <a:solidFill>
+                            <a:schemeClr val="bg1">
+                              <a:lumMod val="50000"/>
+                            </a:schemeClr>
+                          </a:solidFill>
+                          <a:latin typeface="+mn-lt"/>
+                          <a:ea typeface="+mn-ea"/>
+                          <a:cs typeface="+mn-cs"/>
+                        </a:rPr>
+                        <a:t> this data-type that we will cover in later lectures.</a:t>
+                      </a:r>
+                      <a:endParaRPr lang="en-IE" sz="2000" i="1" kern="1200" dirty="0">
+                        <a:solidFill>
+                          <a:schemeClr val="bg1">
+                            <a:lumMod val="50000"/>
+                          </a:schemeClr>
+                        </a:solidFill>
+                        <a:latin typeface="+mn-lt"/>
+                        <a:ea typeface="+mn-ea"/>
+                        <a:cs typeface="+mn-cs"/>
+                      </a:endParaRPr>
+                    </a:p>
+                  </a:txBody>
+                  <a:tcPr>
+                    <a:lnL w="12700" cap="flat" cmpd="sng" algn="ctr">
+                      <a:solidFill>
+                        <a:schemeClr val="tx1"/>
+                      </a:solidFill>
+                      <a:prstDash val="solid"/>
+                      <a:round/>
+                      <a:headEnd type="none" w="med" len="med"/>
+                      <a:tailEnd type="none" w="med" len="med"/>
+                    </a:lnL>
+                    <a:lnR w="12700" cap="flat" cmpd="sng" algn="ctr">
+                      <a:solidFill>
+                        <a:schemeClr val="tx1"/>
+                      </a:solidFill>
+                      <a:prstDash val="solid"/>
+                      <a:round/>
+                      <a:headEnd type="none" w="med" len="med"/>
+                      <a:tailEnd type="none" w="med" len="med"/>
+                    </a:lnR>
+                    <a:lnT w="12700" cap="flat" cmpd="sng" algn="ctr">
+                      <a:solidFill>
+                        <a:schemeClr val="tx1"/>
+                      </a:solidFill>
+                      <a:prstDash val="solid"/>
+                      <a:round/>
+                      <a:headEnd type="none" w="med" len="med"/>
+                      <a:tailEnd type="none" w="med" len="med"/>
+                    </a:lnT>
+                    <a:lnB w="12700" cap="flat" cmpd="sng" algn="ctr">
+                      <a:solidFill>
+                        <a:schemeClr val="tx1"/>
+                      </a:solidFill>
+                      <a:prstDash val="solid"/>
+                      <a:round/>
+                      <a:headEnd type="none" w="med" len="med"/>
+                      <a:tailEnd type="none" w="med" len="med"/>
+                    </a:lnB>
+                  </a:tcPr>
+                </a:tc>
+                <a:tc rowSpan="2" hMerge="1">
+                  <a:txBody>
+                    <a:bodyPr/>
+                    <a:lstStyle/>
+                    <a:p>
+                      <a:pPr marL="0" algn="l" defTabSz="914400" rtl="0" eaLnBrk="1" latinLnBrk="0" hangingPunct="1"/>
+                      <a:endParaRPr lang="en-IE" sz="2400" i="1" kern="1200" dirty="0">
+                        <a:solidFill>
+                          <a:schemeClr val="bg1">
+                            <a:lumMod val="50000"/>
+                          </a:schemeClr>
+                        </a:solidFill>
+                        <a:latin typeface="+mn-lt"/>
+                        <a:ea typeface="+mn-ea"/>
+                        <a:cs typeface="+mn-cs"/>
+                      </a:endParaRPr>
+                    </a:p>
+                  </a:txBody>
+                  <a:tcPr/>
+                </a:tc>
+                <a:tc>
+                  <a:txBody>
+                    <a:bodyPr/>
+                    <a:lstStyle/>
+                    <a:p>
+                      <a:pPr marL="0" algn="l" defTabSz="914400" rtl="0" eaLnBrk="1" latinLnBrk="0" hangingPunct="1"/>
+                      <a:r>
+                        <a:rPr lang="en-IE" sz="2000" kern="1200" dirty="0">
+                          <a:solidFill>
+                            <a:schemeClr val="dk1"/>
+                          </a:solidFill>
+                          <a:latin typeface="+mn-lt"/>
+                          <a:ea typeface="+mn-ea"/>
+                          <a:cs typeface="+mn-cs"/>
+                        </a:rPr>
+                        <a:t>Useful in applications where memory savings apply.</a:t>
+                      </a:r>
+                    </a:p>
+                    <a:p>
+                      <a:pPr marL="0" algn="l" defTabSz="914400" rtl="0" eaLnBrk="1" latinLnBrk="0" hangingPunct="1"/>
+                      <a:endParaRPr lang="en-IE" sz="2000" kern="1200" dirty="0">
+                        <a:solidFill>
+                          <a:schemeClr val="dk1"/>
+                        </a:solidFill>
+                        <a:latin typeface="+mn-lt"/>
+                        <a:ea typeface="+mn-ea"/>
+                        <a:cs typeface="+mn-cs"/>
+                      </a:endParaRPr>
+                    </a:p>
+                    <a:p>
+                      <a:pPr marL="0" algn="l" defTabSz="914400" rtl="0" eaLnBrk="1" latinLnBrk="0" hangingPunct="1"/>
+                      <a:r>
+                        <a:rPr lang="en-IE" sz="2000" kern="1200" dirty="0">
+                          <a:solidFill>
+                            <a:schemeClr val="dk1"/>
+                          </a:solidFill>
+                          <a:latin typeface="+mn-lt"/>
+                          <a:ea typeface="+mn-ea"/>
+                          <a:cs typeface="+mn-cs"/>
+                        </a:rPr>
+                        <a:t>Default choice</a:t>
+                      </a:r>
+                      <a:r>
+                        <a:rPr lang="en-IE" sz="2000" kern="1200" baseline="0" dirty="0">
+                          <a:solidFill>
+                            <a:schemeClr val="dk1"/>
+                          </a:solidFill>
+                          <a:latin typeface="+mn-lt"/>
+                          <a:ea typeface="+mn-ea"/>
+                          <a:cs typeface="+mn-cs"/>
+                        </a:rPr>
+                        <a:t> when using </a:t>
+                      </a:r>
+                      <a:r>
+                        <a:rPr lang="en-IE" sz="2000" b="1" kern="1200" baseline="0" dirty="0">
+                          <a:solidFill>
+                            <a:schemeClr val="dk1"/>
+                          </a:solidFill>
+                          <a:latin typeface="+mn-lt"/>
+                          <a:ea typeface="+mn-ea"/>
+                          <a:cs typeface="+mn-cs"/>
+                        </a:rPr>
+                        <a:t>Processing</a:t>
+                      </a:r>
+                      <a:r>
+                        <a:rPr lang="en-IE" sz="2000" kern="1200" baseline="0" dirty="0">
+                          <a:solidFill>
+                            <a:schemeClr val="dk1"/>
+                          </a:solidFill>
+                          <a:latin typeface="+mn-lt"/>
+                          <a:ea typeface="+mn-ea"/>
+                          <a:cs typeface="+mn-cs"/>
+                        </a:rPr>
+                        <a:t>. </a:t>
+                      </a:r>
+                      <a:endParaRPr lang="en-IE" sz="2000" kern="1200" dirty="0">
+                        <a:solidFill>
+                          <a:schemeClr val="dk1"/>
+                        </a:solidFill>
+                        <a:latin typeface="+mn-lt"/>
+                        <a:ea typeface="+mn-ea"/>
+                        <a:cs typeface="+mn-cs"/>
+                      </a:endParaRPr>
+                    </a:p>
+                  </a:txBody>
+                  <a:tcPr>
+                    <a:lnL w="12700" cap="flat" cmpd="sng" algn="ctr">
+                      <a:solidFill>
+                        <a:schemeClr val="tx1"/>
+                      </a:solidFill>
+                      <a:prstDash val="solid"/>
+                      <a:round/>
+                      <a:headEnd type="none" w="med" len="med"/>
+                      <a:tailEnd type="none" w="med" len="med"/>
+                    </a:lnL>
+                    <a:lnR w="12700" cap="flat" cmpd="sng" algn="ctr">
+                      <a:solidFill>
+                        <a:schemeClr val="tx1"/>
+                      </a:solidFill>
+                      <a:prstDash val="solid"/>
+                      <a:round/>
+                      <a:headEnd type="none" w="med" len="med"/>
+                      <a:tailEnd type="none" w="med" len="med"/>
+                    </a:lnR>
+                    <a:lnT w="12700" cap="flat" cmpd="sng" algn="ctr">
+                      <a:solidFill>
+                        <a:schemeClr val="tx1"/>
+                      </a:solidFill>
+                      <a:prstDash val="solid"/>
+                      <a:round/>
+                      <a:headEnd type="none" w="med" len="med"/>
+                      <a:tailEnd type="none" w="med" len="med"/>
+                    </a:lnT>
+                    <a:lnB w="12700" cap="flat" cmpd="sng" algn="ctr">
+                      <a:solidFill>
+                        <a:schemeClr val="tx1"/>
+                      </a:solidFill>
+                      <a:prstDash val="solid"/>
+                      <a:round/>
+                      <a:headEnd type="none" w="med" len="med"/>
+                      <a:tailEnd type="none" w="med" len="med"/>
+                    </a:lnB>
+                  </a:tcPr>
+                </a:tc>
+                <a:extLst>
+                  <a:ext uri="{0D108BD9-81ED-4DB2-BD59-A6C34878D82A}">
+                    <a16:rowId xmlns:a16="http://schemas.microsoft.com/office/drawing/2014/main" val="10001"/>
+                  </a:ext>
+                </a:extLst>
+              </a:tr>
+              <a:tr h="1160454">
+                <a:tc>
+                  <a:txBody>
+                    <a:bodyPr/>
+                    <a:lstStyle/>
+                    <a:p>
+                      <a:endParaRPr lang="en-IE" sz="2000" dirty="0">
+                        <a:solidFill>
+                          <a:srgbClr val="FF0000"/>
+                        </a:solidFill>
+                      </a:endParaRPr>
+                    </a:p>
+                    <a:p>
+                      <a:r>
+                        <a:rPr lang="en-IE" sz="2000" dirty="0">
+                          <a:solidFill>
+                            <a:srgbClr val="FF0000"/>
+                          </a:solidFill>
+                        </a:rPr>
+                        <a:t>double</a:t>
+                      </a:r>
+                    </a:p>
+                  </a:txBody>
+                  <a:tcPr>
+                    <a:lnL w="12700" cap="flat" cmpd="sng" algn="ctr">
+                      <a:solidFill>
+                        <a:schemeClr val="tx1"/>
+                      </a:solidFill>
+                      <a:prstDash val="solid"/>
+                      <a:round/>
+                      <a:headEnd type="none" w="med" len="med"/>
+                      <a:tailEnd type="none" w="med" len="med"/>
+                    </a:lnL>
+                    <a:lnR w="12700" cap="flat" cmpd="sng" algn="ctr">
+                      <a:solidFill>
+                        <a:schemeClr val="tx1"/>
+                      </a:solidFill>
+                      <a:prstDash val="solid"/>
+                      <a:round/>
+                      <a:headEnd type="none" w="med" len="med"/>
+                      <a:tailEnd type="none" w="med" len="med"/>
+                    </a:lnR>
+                    <a:lnT w="12700" cap="flat" cmpd="sng" algn="ctr">
+                      <a:solidFill>
+                        <a:schemeClr val="tx1"/>
+                      </a:solidFill>
+                      <a:prstDash val="solid"/>
+                      <a:round/>
+                      <a:headEnd type="none" w="med" len="med"/>
+                      <a:tailEnd type="none" w="med" len="med"/>
+                    </a:lnT>
+                    <a:lnB w="12700" cap="flat" cmpd="sng" algn="ctr">
+                      <a:solidFill>
+                        <a:schemeClr val="tx1"/>
+                      </a:solidFill>
+                      <a:prstDash val="solid"/>
+                      <a:round/>
+                      <a:headEnd type="none" w="med" len="med"/>
+                      <a:tailEnd type="none" w="med" len="med"/>
+                    </a:lnB>
+                  </a:tcPr>
+                </a:tc>
+                <a:tc>
+                  <a:txBody>
+                    <a:bodyPr/>
+                    <a:lstStyle/>
+                    <a:p>
+                      <a:endParaRPr lang="en-IE" sz="2000" dirty="0"/>
+                    </a:p>
+                    <a:p>
+                      <a:r>
+                        <a:rPr lang="en-IE" sz="2000" dirty="0"/>
+                        <a:t>64-bit</a:t>
+                      </a:r>
+                    </a:p>
+                  </a:txBody>
+                  <a:tcPr>
+                    <a:lnL w="12700" cap="flat" cmpd="sng" algn="ctr">
+                      <a:solidFill>
+                        <a:schemeClr val="tx1"/>
+                      </a:solidFill>
+                      <a:prstDash val="solid"/>
+                      <a:round/>
+                      <a:headEnd type="none" w="med" len="med"/>
+                      <a:tailEnd type="none" w="med" len="med"/>
+                    </a:lnL>
+                    <a:lnR w="12700" cap="flat" cmpd="sng" algn="ctr">
+                      <a:solidFill>
+                        <a:schemeClr val="tx1"/>
+                      </a:solidFill>
+                      <a:prstDash val="solid"/>
+                      <a:round/>
+                      <a:headEnd type="none" w="med" len="med"/>
+                      <a:tailEnd type="none" w="med" len="med"/>
+                    </a:lnR>
+                    <a:lnT w="12700" cap="flat" cmpd="sng" algn="ctr">
+                      <a:solidFill>
+                        <a:schemeClr val="tx1"/>
+                      </a:solidFill>
+                      <a:prstDash val="solid"/>
+                      <a:round/>
+                      <a:headEnd type="none" w="med" len="med"/>
+                      <a:tailEnd type="none" w="med" len="med"/>
+                    </a:lnT>
+                    <a:lnB w="12700" cap="flat" cmpd="sng" algn="ctr">
+                      <a:solidFill>
+                        <a:schemeClr val="tx1"/>
+                      </a:solidFill>
+                      <a:prstDash val="solid"/>
+                      <a:round/>
+                      <a:headEnd type="none" w="med" len="med"/>
+                      <a:tailEnd type="none" w="med" len="med"/>
+                    </a:lnB>
+                  </a:tcPr>
+                </a:tc>
+                <a:tc gridSpan="2" vMerge="1">
+                  <a:txBody>
+                    <a:bodyPr/>
+                    <a:lstStyle/>
+                    <a:p>
+                      <a:pPr marL="0" algn="l" defTabSz="914400" rtl="0" eaLnBrk="1" latinLnBrk="0" hangingPunct="1"/>
+                      <a:endParaRPr lang="en-IE" sz="2400" i="1" kern="1200" dirty="0">
+                        <a:solidFill>
+                          <a:schemeClr val="bg1">
+                            <a:lumMod val="50000"/>
+                          </a:schemeClr>
+                        </a:solidFill>
+                        <a:latin typeface="+mn-lt"/>
+                        <a:ea typeface="+mn-ea"/>
+                        <a:cs typeface="+mn-cs"/>
+                      </a:endParaRPr>
+                    </a:p>
+                  </a:txBody>
+                  <a:tcPr/>
+                </a:tc>
+                <a:tc hMerge="1" vMerge="1">
+                  <a:txBody>
+                    <a:bodyPr/>
+                    <a:lstStyle/>
+                    <a:p>
+                      <a:pPr marL="0" algn="l" defTabSz="914400" rtl="0" eaLnBrk="1" latinLnBrk="0" hangingPunct="1"/>
+                      <a:endParaRPr lang="en-IE" sz="2400" i="1" kern="1200" dirty="0">
+                        <a:solidFill>
+                          <a:schemeClr val="bg1">
+                            <a:lumMod val="50000"/>
+                          </a:schemeClr>
+                        </a:solidFill>
+                        <a:latin typeface="+mn-lt"/>
+                        <a:ea typeface="+mn-ea"/>
+                        <a:cs typeface="+mn-cs"/>
+                      </a:endParaRPr>
+                    </a:p>
+                  </a:txBody>
+                  <a:tcPr/>
+                </a:tc>
+                <a:tc>
+                  <a:txBody>
+                    <a:bodyPr/>
+                    <a:lstStyle/>
+                    <a:p>
+                      <a:pPr marL="0" algn="l" defTabSz="914400" rtl="0" eaLnBrk="1" latinLnBrk="0" hangingPunct="1"/>
+                      <a:r>
+                        <a:rPr lang="en-IE" sz="2000" kern="1200" dirty="0">
+                          <a:solidFill>
+                            <a:schemeClr val="dk1"/>
+                          </a:solidFill>
+                          <a:latin typeface="+mn-lt"/>
+                          <a:ea typeface="+mn-ea"/>
+                          <a:cs typeface="+mn-cs"/>
+                        </a:rPr>
+                        <a:t>Default</a:t>
+                      </a:r>
+                      <a:r>
+                        <a:rPr lang="en-IE" sz="2000" kern="1200" baseline="0" dirty="0">
+                          <a:solidFill>
+                            <a:schemeClr val="dk1"/>
+                          </a:solidFill>
+                          <a:latin typeface="+mn-lt"/>
+                          <a:ea typeface="+mn-ea"/>
+                          <a:cs typeface="+mn-cs"/>
+                        </a:rPr>
+                        <a:t> choice when programming </a:t>
+                      </a:r>
+                      <a:r>
+                        <a:rPr lang="en-IE" sz="2000" b="1" kern="1200" baseline="0" dirty="0">
+                          <a:solidFill>
+                            <a:schemeClr val="dk1"/>
+                          </a:solidFill>
+                          <a:latin typeface="+mn-lt"/>
+                          <a:ea typeface="+mn-ea"/>
+                          <a:cs typeface="+mn-cs"/>
+                        </a:rPr>
+                        <a:t>Java apps.</a:t>
+                      </a:r>
+                      <a:endParaRPr lang="en-IE" sz="2000" b="1" kern="1200" dirty="0">
+                        <a:solidFill>
+                          <a:schemeClr val="dk1"/>
+                        </a:solidFill>
+                        <a:latin typeface="+mn-lt"/>
+                        <a:ea typeface="+mn-ea"/>
+                        <a:cs typeface="+mn-cs"/>
+                      </a:endParaRPr>
+                    </a:p>
+                  </a:txBody>
+                  <a:tcPr>
+                    <a:lnL w="12700" cap="flat" cmpd="sng" algn="ctr">
+                      <a:solidFill>
+                        <a:schemeClr val="tx1"/>
+                      </a:solidFill>
+                      <a:prstDash val="solid"/>
+                      <a:round/>
+                      <a:headEnd type="none" w="med" len="med"/>
+                      <a:tailEnd type="none" w="med" len="med"/>
+                    </a:lnL>
+                    <a:lnR w="12700" cap="flat" cmpd="sng" algn="ctr">
+                      <a:solidFill>
+                        <a:schemeClr val="tx1"/>
+                      </a:solidFill>
+                      <a:prstDash val="solid"/>
+                      <a:round/>
+                      <a:headEnd type="none" w="med" len="med"/>
+                      <a:tailEnd type="none" w="med" len="med"/>
+                    </a:lnR>
+                    <a:lnT w="12700" cap="flat" cmpd="sng" algn="ctr">
+                      <a:solidFill>
+                        <a:schemeClr val="tx1"/>
+                      </a:solidFill>
+                      <a:prstDash val="solid"/>
+                      <a:round/>
+                      <a:headEnd type="none" w="med" len="med"/>
+                      <a:tailEnd type="none" w="med" len="med"/>
+                    </a:lnT>
+                    <a:lnB w="12700" cap="flat" cmpd="sng" algn="ctr">
+                      <a:solidFill>
+                        <a:schemeClr val="tx1"/>
+                      </a:solidFill>
+                      <a:prstDash val="solid"/>
+                      <a:round/>
+                      <a:headEnd type="none" w="med" len="med"/>
+                      <a:tailEnd type="none" w="med" len="med"/>
+                    </a:lnB>
+                  </a:tcPr>
+                </a:tc>
+                <a:extLst>
+                  <a:ext uri="{0D108BD9-81ED-4DB2-BD59-A6C34878D82A}">
+                    <a16:rowId xmlns:a16="http://schemas.microsoft.com/office/drawing/2014/main" val="10002"/>
                   </a:ext>
                 </a:extLst>
               </a:tr>
@@ -4682,7 +4832,7 @@
     </p:spTree>
     <p:extLst>
       <p:ext uri="{BB962C8B-B14F-4D97-AF65-F5344CB8AC3E}">
-        <p14:creationId xmlns:p14="http://schemas.microsoft.com/office/powerpoint/2010/main" val="859030993"/>
+        <p14:creationId xmlns:p14="http://schemas.microsoft.com/office/powerpoint/2010/main" val="38982879"/>
       </p:ext>
     </p:extLst>
   </p:cSld>
